--- a/decks/geog-rivers/geog-rivers_ch1_water-cycle.pptx
+++ b/decks/geog-rivers/geog-rivers_ch1_water-cycle.pptx
@@ -124,29 +124,29 @@
   <p:extLst>
     <p:ext uri="{521415D9-36F7-43E2-AB2F-B90AF26B5E84}">
       <p14:sectionLst xmlns:p14="http://schemas.microsoft.com/office/powerpoint/2010/main">
-        <p14:section name="Opening" id="{2fc2bdf9-2a1a-648e-ab65-4ba8d3a95da0}">
+        <p14:section name="Opening" id="{a0e276d4-5a41-3144-2085-09c24410c0ca}">
           <p14:sldIdLst>
             <p14:sldId id="256"/>
           </p14:sldIdLst>
         </p14:section>
-        <p14:section name="Gate" id="{86cdbf88-2bba-2850-c1a6-95a0498fd56a}">
+        <p14:section name="Gate" id="{69c44df7-a2e5-1094-08fc-b0825ad654ae}">
           <p14:sldIdLst>
             <p14:sldId id="257"/>
             <p14:sldId id="258"/>
           </p14:sldIdLst>
         </p14:section>
-        <p14:section name="Pre-teach" id="{7a1cdf42-94c9-f2ab-383c-88800f677a66}">
+        <p14:section name="Pre-teach" id="{46ad19df-44f0-6ded-f304-89a24586bbbe}">
           <p14:sldIdLst>
             <p14:sldId id="259"/>
           </p14:sldIdLst>
         </p14:section>
-        <p14:section name="Read-along" id="{aff72d37-8be5-9df3-5a4a-936c062bdb08}">
+        <p14:section name="Read-along" id="{70ea6d0d-6e59-a4ed-46d1-f0c321d1edee}">
           <p14:sldIdLst>
             <p14:sldId id="260"/>
             <p14:sldId id="261"/>
           </p14:sldIdLst>
         </p14:section>
-        <p14:section name="Teach" id="{bddb3a17-8dc4-cbac-74a9-d8f30a974672}">
+        <p14:section name="Teach" id="{eddc7852-0e7a-1363-6af7-a5cd2b991b2d}">
           <p14:sldIdLst>
             <p14:sldId id="262"/>
             <p14:sldId id="263"/>
@@ -154,7 +154,7 @@
             <p14:sldId id="265"/>
           </p14:sldIdLst>
         </p14:section>
-        <p14:section name="Routes" id="{7b3b4343-f7eb-7083-fe2b-e38d1c369405}">
+        <p14:section name="Routes" id="{b28aef1a-24bd-7752-dff0-abc5a6c8e854}">
           <p14:sldIdLst>
             <p14:sldId id="266"/>
             <p14:sldId id="267"/>
@@ -162,12 +162,12 @@
             <p14:sldId id="269"/>
           </p14:sldIdLst>
         </p14:section>
-        <p14:section name="Close" id="{8cd2f6bb-b5a8-350b-09a8-6fa0be2eb21a}">
+        <p14:section name="Close" id="{98593984-69ab-f816-4a2d-000cea3ad8a6}">
           <p14:sldIdLst>
             <p14:sldId id="270"/>
           </p14:sldIdLst>
         </p14:section>
-        <p14:section name="Answers" id="{d5686615-0742-a5f0-8f0e-433165932f69}">
+        <p14:section name="Answers" id="{06692aa2-1beb-a44d-7926-c9c24c6e17ef}">
           <p14:sldIdLst>
             <p14:sldId id="271"/>
             <p14:sldId id="272"/>
@@ -1505,7 +1505,7 @@
               <a:t>Do now — retrieval. Silent, no notes, no help: recall comes before any support. Give about four minutes.
 1. Which process turns liquid water into water vapour?  →  A   Evaporation
 2. Water vapour cools and turns back into tiny droplets, forming clouds. This is called ___.  →  condensation
-3. Which of these rivers is in South America?  →  B   The Amazon
+3. Which of these rivers is in South America?  →  D   The Amazon
 Circulate: who gets 3/3 (Stretch route), 2/3 (Core), 0–1 (Support)? Use this to route pupils later in the lesson.</a:t>
             </a:r>
             <a:endParaRPr lang="en-US" dirty="0"/>
@@ -1597,7 +1597,7 @@
               <a:t>Answers — pupils mark their own in a different colour, then hands up for 3/3, 2/3, 1/3.
 1. A   Evaporation. Evaporation is liquid water turning into water vapour when the sun heats it.
 2. condensation. Condensation is vapour becoming liquid droplets; it is how clouds form.
-3. B   The Amazon. The Amazon flows across Brazil, in South America, to the Atlantic Ocean.
+3. D   The Amazon. The Amazon flows across Brazil, in South America, to the Atlantic Ocean.
 Say the route each score points to: 3/3 Stretch, 2/3 Core, 0–1 Support. Pupils may choose to move up.</a:t>
             </a:r>
             <a:endParaRPr lang="en-US" dirty="0"/>
@@ -8964,7 +8964,7 @@
                 <a:ea typeface="Calibri" pitchFamily="34" charset="-122"/>
                 <a:cs typeface="Calibri" pitchFamily="34" charset="-120"/>
               </a:rPr>
-              <a:t>Evaporation</a:t>
+              <a:t>Condensation</a:t>
             </a:r>
             <a:endParaRPr lang="en-US" sz="2400" dirty="0"/>
           </a:p>
@@ -9038,7 +9038,7 @@
                 <a:ea typeface="Calibri" pitchFamily="34" charset="-122"/>
                 <a:cs typeface="Calibri" pitchFamily="34" charset="-120"/>
               </a:rPr>
-              <a:t>Condensation</a:t>
+              <a:t>Evaporation</a:t>
             </a:r>
             <a:endParaRPr lang="en-US" sz="2400" dirty="0"/>
           </a:p>
@@ -11265,7 +11265,7 @@
                 <a:ea typeface="Calibri" pitchFamily="34" charset="-122"/>
                 <a:cs typeface="Calibri" pitchFamily="34" charset="-120"/>
               </a:rPr>
-              <a:t>Condensation</a:t>
+              <a:t>Infiltration</a:t>
             </a:r>
             <a:endParaRPr lang="en-US" sz="2400" dirty="0"/>
           </a:p>
@@ -11302,7 +11302,7 @@
                 <a:ea typeface="Calibri" pitchFamily="34" charset="-122"/>
                 <a:cs typeface="Calibri" pitchFamily="34" charset="-120"/>
               </a:rPr>
-              <a:t>Precipitation</a:t>
+              <a:t>Condensation</a:t>
             </a:r>
             <a:endParaRPr lang="en-US" sz="2400" dirty="0"/>
           </a:p>
@@ -11339,7 +11339,7 @@
                 <a:ea typeface="Calibri" pitchFamily="34" charset="-122"/>
                 <a:cs typeface="Calibri" pitchFamily="34" charset="-120"/>
               </a:rPr>
-              <a:t>Infiltration</a:t>
+              <a:t>Precipitation</a:t>
             </a:r>
             <a:endParaRPr lang="en-US" sz="2400" dirty="0"/>
           </a:p>
@@ -11778,7 +11778,7 @@
                 <a:ea typeface="Calibri" pitchFamily="34" charset="-122"/>
                 <a:cs typeface="Calibri" pitchFamily="34" charset="-120"/>
               </a:rPr>
-              <a:t>The Amazon</a:t>
+              <a:t>The Mississippi</a:t>
             </a:r>
             <a:endParaRPr lang="en-US" sz="2400" dirty="0"/>
           </a:p>
@@ -11815,7 +11815,7 @@
                 <a:ea typeface="Calibri" pitchFamily="34" charset="-122"/>
                 <a:cs typeface="Calibri" pitchFamily="34" charset="-120"/>
               </a:rPr>
-              <a:t>The Mississippi</a:t>
+              <a:t>The Murray-Darling</a:t>
             </a:r>
             <a:endParaRPr lang="en-US" sz="2400" dirty="0"/>
           </a:p>
@@ -11852,7 +11852,7 @@
                 <a:ea typeface="Calibri" pitchFamily="34" charset="-122"/>
                 <a:cs typeface="Calibri" pitchFamily="34" charset="-120"/>
               </a:rPr>
-              <a:t>The Murray-Darling</a:t>
+              <a:t>The Amazon</a:t>
             </a:r>
             <a:endParaRPr lang="en-US" sz="2400" dirty="0"/>
           </a:p>
@@ -12753,7 +12753,7 @@
                 <a:ea typeface="Calibri" pitchFamily="34" charset="-122"/>
                 <a:cs typeface="Calibri" pitchFamily="34" charset="-120"/>
               </a:rPr>
-              <a:t>B   The Amazon</a:t>
+              <a:t>D   The Amazon</a:t>
             </a:r>
             <a:endParaRPr lang="en-US" sz="2200" dirty="0"/>
           </a:p>

--- a/decks/geog-rivers/geog-rivers_ch1_water-cycle.pptx
+++ b/decks/geog-rivers/geog-rivers_ch1_water-cycle.pptx
@@ -124,29 +124,29 @@
   <p:extLst>
     <p:ext uri="{521415D9-36F7-43E2-AB2F-B90AF26B5E84}">
       <p14:sectionLst xmlns:p14="http://schemas.microsoft.com/office/powerpoint/2010/main">
-        <p14:section name="Opening" id="{a0e276d4-5a41-3144-2085-09c24410c0ca}">
+        <p14:section name="Opening" id="{73aca074-01f1-4ca6-d822-4721b715f275}">
           <p14:sldIdLst>
             <p14:sldId id="256"/>
           </p14:sldIdLst>
         </p14:section>
-        <p14:section name="Gate" id="{69c44df7-a2e5-1094-08fc-b0825ad654ae}">
+        <p14:section name="Gate" id="{e9def124-a454-f02f-b27e-553fe4e4b0b5}">
           <p14:sldIdLst>
             <p14:sldId id="257"/>
             <p14:sldId id="258"/>
           </p14:sldIdLst>
         </p14:section>
-        <p14:section name="Pre-teach" id="{46ad19df-44f0-6ded-f304-89a24586bbbe}">
+        <p14:section name="Pre-teach" id="{9693ab79-f0b2-9f91-b8a3-96c2b5be4b55}">
           <p14:sldIdLst>
             <p14:sldId id="259"/>
           </p14:sldIdLst>
         </p14:section>
-        <p14:section name="Read-along" id="{70ea6d0d-6e59-a4ed-46d1-f0c321d1edee}">
+        <p14:section name="Read-along" id="{cf494bba-473b-6064-9d56-21fad334a0ee}">
           <p14:sldIdLst>
             <p14:sldId id="260"/>
             <p14:sldId id="261"/>
           </p14:sldIdLst>
         </p14:section>
-        <p14:section name="Teach" id="{eddc7852-0e7a-1363-6af7-a5cd2b991b2d}">
+        <p14:section name="Teach" id="{32ceff5a-80c4-e77e-17c0-f23d5fed0e74}">
           <p14:sldIdLst>
             <p14:sldId id="262"/>
             <p14:sldId id="263"/>
@@ -154,7 +154,7 @@
             <p14:sldId id="265"/>
           </p14:sldIdLst>
         </p14:section>
-        <p14:section name="Routes" id="{b28aef1a-24bd-7752-dff0-abc5a6c8e854}">
+        <p14:section name="Routes" id="{bbea14a4-da81-751d-0a2f-8164848e2d54}">
           <p14:sldIdLst>
             <p14:sldId id="266"/>
             <p14:sldId id="267"/>
@@ -162,12 +162,12 @@
             <p14:sldId id="269"/>
           </p14:sldIdLst>
         </p14:section>
-        <p14:section name="Close" id="{98593984-69ab-f816-4a2d-000cea3ad8a6}">
+        <p14:section name="Close" id="{32cf7246-a5bf-f792-84f0-29f01028f66a}">
           <p14:sldIdLst>
             <p14:sldId id="270"/>
           </p14:sldIdLst>
         </p14:section>
-        <p14:section name="Answers" id="{06692aa2-1beb-a44d-7926-c9c24c6e17ef}">
+        <p14:section name="Answers" id="{fc153ad5-d077-816c-7041-5aaf3dc470cb}">
           <p14:sldIdLst>
             <p14:sldId id="271"/>
             <p14:sldId id="272"/>
